--- a/decks/day2/module-8-lab-kickoff.pptx
+++ b/decks/day2/module-8-lab-kickoff.pptx
@@ -6866,7 +6866,7 @@
                 <a:ea typeface="Calibri" pitchFamily="34" charset="-122"/>
                 <a:cs typeface="Calibri" pitchFamily="34" charset="-120"/>
               </a:rPr>
-              <a:t>Recommended model: gpt-5.4-mini (from Day 1)</a:t>
+              <a:t>Recommended model: gpt-5.6-luna (from Day 1)</a:t>
             </a:r>
             <a:endParaRPr lang="en-US" sz="1200" dirty="0"/>
           </a:p>
